--- a/brand/beyna-agency/social/editable-pptx/Beyna-LinkedIn-Posts-1200x1200-EDITABLE.pptx
+++ b/brand/beyna-agency/social/editable-pptx/Beyna-LinkedIn-Posts-1200x1200-EDITABLE.pptx
@@ -3664,7 +3664,7 @@
             <a:r>
               <a:rPr b="1" sz="7200" spc="-216">
                 <a:solidFill>
-                  <a:srgbClr val="24242B"/>
+                  <a:srgbClr val="1B1046"/>
                 </a:solidFill>
                 <a:latin typeface="Syne"/>
               </a:rPr>
@@ -3682,7 +3682,7 @@
             <a:r>
               <a:rPr b="1" sz="7200" spc="-216">
                 <a:solidFill>
-                  <a:srgbClr val="24242B"/>
+                  <a:srgbClr val="1B1046"/>
                 </a:solidFill>
                 <a:latin typeface="Syne"/>
               </a:rPr>
@@ -3719,7 +3719,7 @@
             <a:r>
               <a:rPr b="1" sz="2100">
                 <a:solidFill>
-                  <a:srgbClr val="24242B"/>
+                  <a:srgbClr val="1B1046"/>
                 </a:solidFill>
                 <a:latin typeface="Manrope"/>
               </a:rPr>
